--- a/CreditCardFraudDetectionPosterDraft.pptx
+++ b/CreditCardFraudDetectionPosterDraft.pptx
@@ -1347,7 +1347,7 @@
           <a:p>
             <a:fld id="{CEBE6B28-3DE3-42BF-951E-F1C85EED5018}" type="datetimeFigureOut">
               <a:rPr lang="en-US" smtClean="0"/>
-              <a:t>4/21/2026</a:t>
+              <a:t>4/22/2026</a:t>
             </a:fld>
             <a:endParaRPr lang="en-US"/>
           </a:p>
@@ -5853,7 +5853,7 @@
         </p:nvSpPr>
         <p:spPr bwMode="auto">
           <a:xfrm>
-            <a:off x="2283786" y="3957726"/>
+            <a:off x="2283786" y="3847998"/>
             <a:ext cx="9319704" cy="923330"/>
           </a:xfrm>
           <a:prstGeom prst="rect">
@@ -5915,7 +5915,7 @@
                 <a:latin typeface="Times" charset="0"/>
                 <a:ea typeface="ＭＳ Ｐゴシック" charset="0"/>
               </a:rPr>
-              <a:t>Project Goals/Why It’s Useful:</a:t>
+              <a:t>Project Goals:</a:t>
             </a:r>
             <a:endParaRPr lang="en-US" sz="3600" dirty="0">
               <a:solidFill>
@@ -6083,7 +6083,7 @@
         </p:nvSpPr>
         <p:spPr bwMode="auto">
           <a:xfrm>
-            <a:off x="2339344" y="15555431"/>
+            <a:off x="2270954" y="19549082"/>
             <a:ext cx="8232722" cy="2169825"/>
           </a:xfrm>
           <a:prstGeom prst="rect">
@@ -6181,8 +6181,8 @@
         </p:nvSpPr>
         <p:spPr bwMode="auto">
           <a:xfrm>
-            <a:off x="1957388" y="15544800"/>
-            <a:ext cx="10563226" cy="14524892"/>
+            <a:off x="1957388" y="19455890"/>
+            <a:ext cx="10563226" cy="10613800"/>
           </a:xfrm>
           <a:prstGeom prst="rect">
             <a:avLst/>
@@ -6337,7 +6337,7 @@
         <p:spPr bwMode="auto">
           <a:xfrm>
             <a:off x="1957388" y="3725196"/>
-            <a:ext cx="10563225" cy="11327512"/>
+            <a:ext cx="10563225" cy="8355199"/>
           </a:xfrm>
           <a:prstGeom prst="rect">
             <a:avLst/>
@@ -6843,59 +6843,6 @@
       </p:sp>
       <p:sp>
         <p:nvSpPr>
-          <p:cNvPr id="6" name="TextBox 5">
-            <a:extLst>
-              <a:ext uri="{FF2B5EF4-FFF2-40B4-BE49-F238E27FC236}">
-                <a16:creationId xmlns:a16="http://schemas.microsoft.com/office/drawing/2014/main" id="{1F6E6DB1-8C67-6A1A-D4F0-D6F0E0E5933C}"/>
-              </a:ext>
-            </a:extLst>
-          </p:cNvPr>
-          <p:cNvSpPr txBox="1"/>
-          <p:nvPr/>
-        </p:nvSpPr>
-        <p:spPr>
-          <a:xfrm>
-            <a:off x="2734684" y="4901237"/>
-            <a:ext cx="9193309" cy="10802957"/>
-          </a:xfrm>
-          <a:prstGeom prst="rect">
-            <a:avLst/>
-          </a:prstGeom>
-          <a:noFill/>
-        </p:spPr>
-        <p:txBody>
-          <a:bodyPr rot="0" spcFirstLastPara="0" vertOverflow="overflow" horzOverflow="overflow" vert="horz" wrap="square" lIns="91440" tIns="45720" rIns="91440" bIns="45720" numCol="1" spcCol="0" rtlCol="0" fromWordArt="0" anchor="t" anchorCtr="0" forceAA="0" compatLnSpc="1">
-            <a:prstTxWarp prst="textNoShape">
-              <a:avLst/>
-            </a:prstTxWarp>
-            <a:spAutoFit/>
-          </a:bodyPr>
-          <a:lstStyle/>
-          <a:p>
-            <a:r>
-              <a:rPr lang="en-US" sz="4400" dirty="0"/>
-              <a:t>Our project goals were to build an end-to-end data analytics pipeline that detects potentially fraudulent credit card transactions. The system processes transaction data, applies machine learning to identify suspicious activity, and presents the results through an interactive dashboard.</a:t>
-            </a:r>
-          </a:p>
-          <a:p>
-            <a:endParaRPr lang="en-US" sz="4400" dirty="0"/>
-          </a:p>
-          <a:p>
-            <a:r>
-              <a:rPr lang="en-US" sz="4400" dirty="0"/>
-              <a:t>This is useful because it shows how automated systems can quickly analyze large amounts of financial data, flag suspicious transactions, and provide clear insights that help improve security and reduce potential financial loss.</a:t>
-            </a:r>
-          </a:p>
-          <a:p>
-            <a:pPr algn="l"/>
-            <a:endParaRPr lang="en-US" sz="3600" dirty="0">
-              <a:cs typeface="Times"/>
-            </a:endParaRPr>
-          </a:p>
-        </p:txBody>
-      </p:sp>
-      <p:sp>
-        <p:nvSpPr>
           <p:cNvPr id="11" name="Text Box 17">
             <a:extLst>
               <a:ext uri="{FF2B5EF4-FFF2-40B4-BE49-F238E27FC236}">
@@ -6993,8 +6940,8 @@
         </p:nvSpPr>
         <p:spPr>
           <a:xfrm>
-            <a:off x="25755645" y="4889619"/>
-            <a:ext cx="10341625" cy="14188500"/>
+            <a:off x="25755645" y="5291955"/>
+            <a:ext cx="10341625" cy="12834283"/>
           </a:xfrm>
           <a:prstGeom prst="rect">
             <a:avLst/>
@@ -7108,7 +7055,7 @@
             </a:pPr>
             <a:r>
               <a:rPr lang="en-US" sz="4400" dirty="0"/>
-              <a:t>Display the results in the dashboard using charts, summaries, and visualizations to highlight suspicious patterns and trends in the data.</a:t>
+              <a:t>Display the results in the dashboard using charts, summaries, and visualizations</a:t>
             </a:r>
             <a:endParaRPr lang="en-US" sz="4200" dirty="0">
               <a:solidFill>
@@ -7304,8 +7251,8 @@
         </p:nvSpPr>
         <p:spPr>
           <a:xfrm>
-            <a:off x="2205928" y="16621491"/>
-            <a:ext cx="9894313" cy="13542169"/>
+            <a:off x="2348312" y="20580251"/>
+            <a:ext cx="9894313" cy="10156627"/>
           </a:xfrm>
           <a:prstGeom prst="rect">
             <a:avLst/>
@@ -7327,11 +7274,19 @@
             </a:pPr>
             <a:r>
               <a:rPr lang="en-US" sz="4400" b="1" dirty="0"/>
-              <a:t>Python:</a:t>
+              <a:t>Python(</a:t>
+            </a:r>
+            <a:r>
+              <a:rPr lang="en-US" sz="4400" b="1" dirty="0" err="1"/>
+              <a:t>sckit</a:t>
+            </a:r>
+            <a:r>
+              <a:rPr lang="en-US" sz="4400" b="1" dirty="0"/>
+              <a:t>-learn):</a:t>
             </a:r>
             <a:r>
               <a:rPr lang="en-US" sz="4400" dirty="0"/>
-              <a:t> Used for data analysis, machine learning, and building the fraud detection model.</a:t>
+              <a:t> To construct machine learning model and doing inference</a:t>
             </a:r>
           </a:p>
           <a:p>
@@ -7408,7 +7363,7 @@
             </a:r>
             <a:r>
               <a:rPr lang="en-US" sz="4400" dirty="0"/>
-              <a:t> Used to develop the interactive dashboard for uploading data and visualizing fraud detection results, and the system diagram</a:t>
+              <a:t> Used to develop the interactive dashboard for data input</a:t>
             </a:r>
             <a:endParaRPr lang="en-US" sz="4200" dirty="0">
               <a:solidFill>
@@ -7424,73 +7379,6 @@
               </a:solidFill>
               <a:cs typeface="Times"/>
             </a:endParaRPr>
-          </a:p>
-          <a:p>
-            <a:pPr marL="571500" indent="-571500">
-              <a:buFont typeface="Arial"/>
-              <a:buChar char="•"/>
-            </a:pPr>
-            <a:r>
-              <a:rPr lang="en-US" sz="4400" b="1" dirty="0"/>
-              <a:t>Machine Learning (scikit-learn):</a:t>
-            </a:r>
-            <a:r>
-              <a:rPr lang="en-US" sz="4400" dirty="0"/>
-              <a:t> Used to train a model that predicts fraudulent transactions.</a:t>
-            </a:r>
-            <a:endParaRPr lang="en-US" sz="4200" dirty="0">
-              <a:solidFill>
-                <a:srgbClr val="003D7E"/>
-              </a:solidFill>
-              <a:cs typeface="Times"/>
-            </a:endParaRPr>
-          </a:p>
-        </p:txBody>
-      </p:sp>
-      <p:sp>
-        <p:nvSpPr>
-          <p:cNvPr id="7" name="TextBox 6">
-            <a:extLst>
-              <a:ext uri="{FF2B5EF4-FFF2-40B4-BE49-F238E27FC236}">
-                <a16:creationId xmlns:a16="http://schemas.microsoft.com/office/drawing/2014/main" id="{92F599DC-7998-73F4-86C5-30333678C7F4}"/>
-              </a:ext>
-            </a:extLst>
-          </p:cNvPr>
-          <p:cNvSpPr txBox="1"/>
-          <p:nvPr/>
-        </p:nvSpPr>
-        <p:spPr>
-          <a:xfrm>
-            <a:off x="25924921" y="20702492"/>
-            <a:ext cx="10273950" cy="8894743"/>
-          </a:xfrm>
-          <a:prstGeom prst="rect">
-            <a:avLst/>
-          </a:prstGeom>
-          <a:noFill/>
-        </p:spPr>
-        <p:txBody>
-          <a:bodyPr rot="0" spcFirstLastPara="0" vertOverflow="overflow" horzOverflow="overflow" vert="horz" wrap="square" lIns="91440" tIns="45720" rIns="91440" bIns="45720" numCol="1" spcCol="0" rtlCol="0" fromWordArt="0" anchor="t" anchorCtr="0" forceAA="0" compatLnSpc="1">
-            <a:prstTxWarp prst="textNoShape">
-              <a:avLst/>
-            </a:prstTxWarp>
-            <a:spAutoFit/>
-          </a:bodyPr>
-          <a:lstStyle/>
-          <a:p>
-            <a:r>
-              <a:rPr lang="en-US" sz="4400" dirty="0"/>
-              <a:t>In the future, the system can be improved by increasing the accuracy of the fraud detection model through better feature engineering, larger datasets, and more advanced machine learning algorithms.</a:t>
-            </a:r>
-          </a:p>
-          <a:p>
-            <a:endParaRPr lang="en-US" sz="4400" dirty="0"/>
-          </a:p>
-          <a:p>
-            <a:r>
-              <a:rPr lang="en-US" sz="4400" dirty="0"/>
-              <a:t>The project can also be expanded beyond credit card transactions to include other financial activities such as online transfers, digital wallets, and peer-to-peer payments. We can also improve the dashboard and data generation process to make the system more realistic and user-friendly.</a:t>
-            </a:r>
           </a:p>
         </p:txBody>
       </p:sp>
@@ -8389,6 +8277,504 @@
             <a:r>
               <a:rPr lang="en-US" sz="4400" dirty="0"/>
               <a:t>Built an interactive dashboard that visualizes results in a clear, informative, user-friendly way</a:t>
+            </a:r>
+            <a:endParaRPr lang="en-US" sz="4200" dirty="0">
+              <a:solidFill>
+                <a:srgbClr val="003D7E"/>
+              </a:solidFill>
+              <a:cs typeface="Times"/>
+            </a:endParaRPr>
+          </a:p>
+        </p:txBody>
+      </p:sp>
+      <p:sp>
+        <p:nvSpPr>
+          <p:cNvPr id="8" name="Text Box 7">
+            <a:extLst>
+              <a:ext uri="{FF2B5EF4-FFF2-40B4-BE49-F238E27FC236}">
+                <a16:creationId xmlns:a16="http://schemas.microsoft.com/office/drawing/2014/main" id="{9B5F08FD-63EB-D411-1931-C688A8E53270}"/>
+              </a:ext>
+            </a:extLst>
+          </p:cNvPr>
+          <p:cNvSpPr txBox="1">
+            <a:spLocks noChangeArrowheads="1"/>
+          </p:cNvSpPr>
+          <p:nvPr/>
+        </p:nvSpPr>
+        <p:spPr bwMode="auto">
+          <a:xfrm>
+            <a:off x="2179425" y="12325775"/>
+            <a:ext cx="9319704" cy="923330"/>
+          </a:xfrm>
+          <a:prstGeom prst="rect">
+            <a:avLst/>
+          </a:prstGeom>
+          <a:noFill/>
+          <a:ln>
+            <a:noFill/>
+          </a:ln>
+          <a:effectLst/>
+          <a:extLst>
+            <a:ext uri="{909E8E84-426E-40DD-AFC4-6F175D3DCCD1}">
+              <a14:hiddenFill xmlns:a14="http://schemas.microsoft.com/office/drawing/2010/main">
+                <a:solidFill>
+                  <a:schemeClr val="accent1"/>
+                </a:solidFill>
+              </a14:hiddenFill>
+            </a:ext>
+            <a:ext uri="{91240B29-F687-4F45-9708-019B960494DF}">
+              <a14:hiddenLine xmlns:a14="http://schemas.microsoft.com/office/drawing/2010/main" w="9525">
+                <a:solidFill>
+                  <a:schemeClr val="tx1"/>
+                </a:solidFill>
+                <a:miter lim="800000"/>
+                <a:headEnd/>
+                <a:tailEnd/>
+              </a14:hiddenLine>
+            </a:ext>
+            <a:ext uri="{AF507438-7753-43E0-B8FC-AC1667EBCBE1}">
+              <a14:hiddenEffects xmlns:a14="http://schemas.microsoft.com/office/drawing/2010/main">
+                <a:effectLst>
+                  <a:outerShdw blurRad="63500" dist="38099" dir="2700000" algn="ctr" rotWithShape="0">
+                    <a:schemeClr val="bg2">
+                      <a:alpha val="74998"/>
+                    </a:schemeClr>
+                  </a:outerShdw>
+                </a:effectLst>
+              </a14:hiddenEffects>
+            </a:ext>
+          </a:extLst>
+        </p:spPr>
+        <p:txBody>
+          <a:bodyPr wrap="square">
+            <a:spAutoFit/>
+          </a:bodyPr>
+          <a:lstStyle/>
+          <a:p>
+            <a:pPr>
+              <a:spcBef>
+                <a:spcPct val="50000"/>
+              </a:spcBef>
+              <a:defRPr/>
+            </a:pPr>
+            <a:r>
+              <a:rPr lang="en-US" sz="5400" b="1" dirty="0">
+                <a:solidFill>
+                  <a:srgbClr val="F58426"/>
+                </a:solidFill>
+                <a:latin typeface="Times" charset="0"/>
+                <a:ea typeface="ＭＳ Ｐゴシック" charset="0"/>
+              </a:rPr>
+              <a:t>Why It’s Useful:</a:t>
+            </a:r>
+            <a:endParaRPr lang="en-US" sz="3600" dirty="0">
+              <a:solidFill>
+                <a:srgbClr val="F58426"/>
+              </a:solidFill>
+              <a:latin typeface="Times" charset="0"/>
+              <a:ea typeface="ＭＳ Ｐゴシック" charset="0"/>
+            </a:endParaRPr>
+          </a:p>
+        </p:txBody>
+      </p:sp>
+      <p:sp>
+        <p:nvSpPr>
+          <p:cNvPr id="9" name="TextBox 8">
+            <a:extLst>
+              <a:ext uri="{FF2B5EF4-FFF2-40B4-BE49-F238E27FC236}">
+                <a16:creationId xmlns:a16="http://schemas.microsoft.com/office/drawing/2014/main" id="{4F8AF8EB-5F12-FDEB-D5EA-327F7F445132}"/>
+              </a:ext>
+            </a:extLst>
+          </p:cNvPr>
+          <p:cNvSpPr txBox="1"/>
+          <p:nvPr/>
+        </p:nvSpPr>
+        <p:spPr>
+          <a:xfrm>
+            <a:off x="2217434" y="4590223"/>
+            <a:ext cx="10341625" cy="7448193"/>
+          </a:xfrm>
+          <a:prstGeom prst="rect">
+            <a:avLst/>
+          </a:prstGeom>
+          <a:noFill/>
+        </p:spPr>
+        <p:txBody>
+          <a:bodyPr rot="0" spcFirstLastPara="0" vertOverflow="overflow" horzOverflow="overflow" vert="horz" wrap="square" lIns="91440" tIns="45720" rIns="91440" bIns="45720" numCol="1" spcCol="0" rtlCol="0" fromWordArt="0" anchor="t" anchorCtr="0" forceAA="0" compatLnSpc="1">
+            <a:prstTxWarp prst="textNoShape">
+              <a:avLst/>
+            </a:prstTxWarp>
+            <a:spAutoFit/>
+          </a:bodyPr>
+          <a:lstStyle/>
+          <a:p>
+            <a:pPr marL="571500" indent="-571500">
+              <a:buFont typeface="Arial"/>
+              <a:buChar char="•"/>
+            </a:pPr>
+            <a:r>
+              <a:rPr lang="en-US" sz="4400" dirty="0"/>
+              <a:t>Build an end-to-end data analytics pipeline for credit card transactions</a:t>
+            </a:r>
+          </a:p>
+          <a:p>
+            <a:pPr marL="571500" indent="-571500">
+              <a:buFont typeface="Arial"/>
+              <a:buChar char="•"/>
+            </a:pPr>
+            <a:endParaRPr lang="en-US" sz="4200" dirty="0">
+              <a:solidFill>
+                <a:srgbClr val="003D7E"/>
+              </a:solidFill>
+              <a:latin typeface="Times"/>
+              <a:ea typeface="MS PGothic"/>
+              <a:cs typeface="Times"/>
+            </a:endParaRPr>
+          </a:p>
+          <a:p>
+            <a:pPr marL="571500" indent="-571500">
+              <a:buFont typeface="Arial"/>
+              <a:buChar char="•"/>
+            </a:pPr>
+            <a:r>
+              <a:rPr lang="en-US" sz="4400" dirty="0"/>
+              <a:t>Process and analyze transaction data to detect suspicious activity</a:t>
+            </a:r>
+          </a:p>
+          <a:p>
+            <a:pPr marL="571500" indent="-571500">
+              <a:buFont typeface="Arial"/>
+              <a:buChar char="•"/>
+            </a:pPr>
+            <a:endParaRPr lang="en-US" sz="4200" dirty="0">
+              <a:solidFill>
+                <a:srgbClr val="003D7E"/>
+              </a:solidFill>
+              <a:cs typeface="Times"/>
+            </a:endParaRPr>
+          </a:p>
+          <a:p>
+            <a:pPr marL="571500" indent="-571500">
+              <a:buFont typeface="Arial"/>
+              <a:buChar char="•"/>
+            </a:pPr>
+            <a:r>
+              <a:rPr lang="en-US" sz="4400" dirty="0"/>
+              <a:t>Apply machine learning to identify potentially fraudulent transactions</a:t>
+            </a:r>
+          </a:p>
+          <a:p>
+            <a:pPr marL="571500" indent="-571500">
+              <a:buFont typeface="Arial"/>
+              <a:buChar char="•"/>
+            </a:pPr>
+            <a:endParaRPr lang="en-US" sz="4200" dirty="0">
+              <a:solidFill>
+                <a:srgbClr val="003D7E"/>
+              </a:solidFill>
+              <a:cs typeface="Times"/>
+            </a:endParaRPr>
+          </a:p>
+          <a:p>
+            <a:pPr marL="571500" indent="-571500">
+              <a:buFont typeface="Arial"/>
+              <a:buChar char="•"/>
+            </a:pPr>
+            <a:r>
+              <a:rPr lang="en-US" sz="4400" dirty="0"/>
+              <a:t>Present results through a clear, interactive dashboard</a:t>
+            </a:r>
+            <a:endParaRPr lang="en-US" sz="4200" dirty="0">
+              <a:solidFill>
+                <a:srgbClr val="003D7E"/>
+              </a:solidFill>
+              <a:cs typeface="Times"/>
+            </a:endParaRPr>
+          </a:p>
+        </p:txBody>
+      </p:sp>
+      <p:sp>
+        <p:nvSpPr>
+          <p:cNvPr id="10" name="Rectangle 15">
+            <a:extLst>
+              <a:ext uri="{FF2B5EF4-FFF2-40B4-BE49-F238E27FC236}">
+                <a16:creationId xmlns:a16="http://schemas.microsoft.com/office/drawing/2014/main" id="{F8E84671-7885-3368-D5DE-2ED6D480084C}"/>
+              </a:ext>
+            </a:extLst>
+          </p:cNvPr>
+          <p:cNvSpPr>
+            <a:spLocks noChangeArrowheads="1"/>
+          </p:cNvSpPr>
+          <p:nvPr/>
+        </p:nvSpPr>
+        <p:spPr bwMode="auto">
+          <a:xfrm>
+            <a:off x="2013855" y="12359211"/>
+            <a:ext cx="10563225" cy="6746779"/>
+          </a:xfrm>
+          <a:prstGeom prst="rect">
+            <a:avLst/>
+          </a:prstGeom>
+          <a:noFill/>
+          <a:ln w="38100">
+            <a:solidFill>
+              <a:schemeClr val="tx1"/>
+            </a:solidFill>
+            <a:miter lim="800000"/>
+            <a:headEnd/>
+            <a:tailEnd/>
+          </a:ln>
+          <a:effectLst/>
+          <a:extLst>
+            <a:ext uri="{909E8E84-426E-40DD-AFC4-6F175D3DCCD1}">
+              <a14:hiddenFill xmlns:a14="http://schemas.microsoft.com/office/drawing/2010/main">
+                <a:solidFill>
+                  <a:schemeClr val="bg1"/>
+                </a:solidFill>
+              </a14:hiddenFill>
+            </a:ext>
+            <a:ext uri="{AF507438-7753-43E0-B8FC-AC1667EBCBE1}">
+              <a14:hiddenEffects xmlns:a14="http://schemas.microsoft.com/office/drawing/2010/main">
+                <a:effectLst>
+                  <a:outerShdw blurRad="63500" dist="38099" dir="2700000" algn="ctr" rotWithShape="0">
+                    <a:schemeClr val="bg2">
+                      <a:alpha val="74998"/>
+                    </a:schemeClr>
+                  </a:outerShdw>
+                </a:effectLst>
+              </a14:hiddenEffects>
+            </a:ext>
+          </a:extLst>
+        </p:spPr>
+        <p:txBody>
+          <a:bodyPr wrap="none" anchor="ctr"/>
+          <a:lstStyle/>
+          <a:p>
+            <a:pPr>
+              <a:defRPr/>
+            </a:pPr>
+            <a:endParaRPr lang="en-US">
+              <a:solidFill>
+                <a:srgbClr val="003D7E"/>
+              </a:solidFill>
+              <a:latin typeface="Times" charset="0"/>
+              <a:ea typeface="ＭＳ Ｐゴシック" charset="0"/>
+            </a:endParaRPr>
+          </a:p>
+        </p:txBody>
+      </p:sp>
+      <p:sp>
+        <p:nvSpPr>
+          <p:cNvPr id="12" name="TextBox 11">
+            <a:extLst>
+              <a:ext uri="{FF2B5EF4-FFF2-40B4-BE49-F238E27FC236}">
+                <a16:creationId xmlns:a16="http://schemas.microsoft.com/office/drawing/2014/main" id="{9BF4DDDC-560B-53BE-B326-9AA23BABF3B2}"/>
+              </a:ext>
+            </a:extLst>
+          </p:cNvPr>
+          <p:cNvSpPr txBox="1"/>
+          <p:nvPr/>
+        </p:nvSpPr>
+        <p:spPr>
+          <a:xfrm>
+            <a:off x="2354283" y="12981236"/>
+            <a:ext cx="10144065" cy="6124754"/>
+          </a:xfrm>
+          <a:prstGeom prst="rect">
+            <a:avLst/>
+          </a:prstGeom>
+          <a:noFill/>
+        </p:spPr>
+        <p:txBody>
+          <a:bodyPr rot="0" spcFirstLastPara="0" vertOverflow="overflow" horzOverflow="overflow" vert="horz" wrap="square" lIns="91440" tIns="45720" rIns="91440" bIns="45720" numCol="1" spcCol="0" rtlCol="0" fromWordArt="0" anchor="t" anchorCtr="0" forceAA="0" compatLnSpc="1">
+            <a:prstTxWarp prst="textNoShape">
+              <a:avLst/>
+            </a:prstTxWarp>
+            <a:spAutoFit/>
+          </a:bodyPr>
+          <a:lstStyle/>
+          <a:p>
+            <a:pPr marL="571500" indent="-571500">
+              <a:buFont typeface="Arial"/>
+              <a:buChar char="•"/>
+            </a:pPr>
+            <a:r>
+              <a:rPr lang="en-US" sz="4400" dirty="0"/>
+              <a:t>Automates fraud detection on large volumes of data</a:t>
+            </a:r>
+          </a:p>
+          <a:p>
+            <a:pPr marL="571500" indent="-571500">
+              <a:buFont typeface="Arial"/>
+              <a:buChar char="•"/>
+            </a:pPr>
+            <a:endParaRPr lang="en-US" sz="4200" dirty="0">
+              <a:solidFill>
+                <a:srgbClr val="003D7E"/>
+              </a:solidFill>
+              <a:latin typeface="Times"/>
+              <a:ea typeface="MS PGothic"/>
+              <a:cs typeface="Times"/>
+            </a:endParaRPr>
+          </a:p>
+          <a:p>
+            <a:pPr marL="571500" indent="-571500">
+              <a:buFont typeface="Arial"/>
+              <a:buChar char="•"/>
+            </a:pPr>
+            <a:r>
+              <a:rPr lang="en-US" sz="4400" dirty="0"/>
+              <a:t>Quickly flags suspicious transactions</a:t>
+            </a:r>
+          </a:p>
+          <a:p>
+            <a:pPr marL="571500" indent="-571500">
+              <a:buFont typeface="Arial"/>
+              <a:buChar char="•"/>
+            </a:pPr>
+            <a:endParaRPr lang="en-US" sz="4200" dirty="0">
+              <a:solidFill>
+                <a:srgbClr val="003D7E"/>
+              </a:solidFill>
+              <a:latin typeface="Times"/>
+              <a:ea typeface="MS PGothic"/>
+              <a:cs typeface="Times"/>
+            </a:endParaRPr>
+          </a:p>
+          <a:p>
+            <a:pPr marL="571500" indent="-571500">
+              <a:buFont typeface="Arial"/>
+              <a:buChar char="•"/>
+            </a:pPr>
+            <a:r>
+              <a:rPr lang="en-US" sz="4400" dirty="0"/>
+              <a:t>Reduces reliance on manual analysis</a:t>
+            </a:r>
+          </a:p>
+          <a:p>
+            <a:pPr marL="571500" indent="-571500">
+              <a:buFont typeface="Arial"/>
+              <a:buChar char="•"/>
+            </a:pPr>
+            <a:endParaRPr lang="en-US" sz="4400" dirty="0"/>
+          </a:p>
+          <a:p>
+            <a:pPr marL="571500" indent="-571500">
+              <a:buFont typeface="Arial"/>
+              <a:buChar char="•"/>
+            </a:pPr>
+            <a:r>
+              <a:rPr lang="en-US" sz="4400" dirty="0"/>
+              <a:t>Helps improve financial security and reduce potential losses</a:t>
+            </a:r>
+            <a:endParaRPr lang="en-US" sz="4200" dirty="0">
+              <a:solidFill>
+                <a:srgbClr val="003D7E"/>
+              </a:solidFill>
+              <a:cs typeface="Times"/>
+            </a:endParaRPr>
+          </a:p>
+        </p:txBody>
+      </p:sp>
+      <p:sp>
+        <p:nvSpPr>
+          <p:cNvPr id="13" name="TextBox 12">
+            <a:extLst>
+              <a:ext uri="{FF2B5EF4-FFF2-40B4-BE49-F238E27FC236}">
+                <a16:creationId xmlns:a16="http://schemas.microsoft.com/office/drawing/2014/main" id="{97CB00F5-D6E2-443B-FE47-171EBB8A560C}"/>
+              </a:ext>
+            </a:extLst>
+          </p:cNvPr>
+          <p:cNvSpPr txBox="1"/>
+          <p:nvPr/>
+        </p:nvSpPr>
+        <p:spPr>
+          <a:xfrm>
+            <a:off x="25912423" y="20759378"/>
+            <a:ext cx="10144065" cy="8833187"/>
+          </a:xfrm>
+          <a:prstGeom prst="rect">
+            <a:avLst/>
+          </a:prstGeom>
+          <a:noFill/>
+        </p:spPr>
+        <p:txBody>
+          <a:bodyPr rot="0" spcFirstLastPara="0" vertOverflow="overflow" horzOverflow="overflow" vert="horz" wrap="square" lIns="91440" tIns="45720" rIns="91440" bIns="45720" numCol="1" spcCol="0" rtlCol="0" fromWordArt="0" anchor="t" anchorCtr="0" forceAA="0" compatLnSpc="1">
+            <a:prstTxWarp prst="textNoShape">
+              <a:avLst/>
+            </a:prstTxWarp>
+            <a:spAutoFit/>
+          </a:bodyPr>
+          <a:lstStyle/>
+          <a:p>
+            <a:pPr marL="571500" indent="-571500">
+              <a:buFont typeface="Arial"/>
+              <a:buChar char="•"/>
+            </a:pPr>
+            <a:r>
+              <a:rPr lang="en-US" sz="4400" dirty="0"/>
+              <a:t>Improve model accuracy with better features, larger datasets, and advanced algorithms</a:t>
+            </a:r>
+          </a:p>
+          <a:p>
+            <a:endParaRPr lang="en-US" sz="4200" dirty="0">
+              <a:solidFill>
+                <a:srgbClr val="003D7E"/>
+              </a:solidFill>
+              <a:latin typeface="Times"/>
+              <a:ea typeface="MS PGothic"/>
+              <a:cs typeface="Times"/>
+            </a:endParaRPr>
+          </a:p>
+          <a:p>
+            <a:pPr marL="571500" indent="-571500">
+              <a:buFont typeface="Arial"/>
+              <a:buChar char="•"/>
+            </a:pPr>
+            <a:r>
+              <a:rPr lang="en-US" sz="4400" dirty="0"/>
+              <a:t>Expand beyond credit cards to online transfers, digital wallets, and P2P payments</a:t>
+            </a:r>
+          </a:p>
+          <a:p>
+            <a:pPr marL="571500" indent="-571500">
+              <a:buFont typeface="Arial"/>
+              <a:buChar char="•"/>
+            </a:pPr>
+            <a:endParaRPr lang="en-US" sz="4200" dirty="0">
+              <a:solidFill>
+                <a:srgbClr val="003D7E"/>
+              </a:solidFill>
+              <a:latin typeface="Times"/>
+              <a:ea typeface="MS PGothic"/>
+              <a:cs typeface="Times"/>
+            </a:endParaRPr>
+          </a:p>
+          <a:p>
+            <a:pPr marL="571500" indent="-571500">
+              <a:buFont typeface="Arial"/>
+              <a:buChar char="•"/>
+            </a:pPr>
+            <a:r>
+              <a:rPr lang="en-US" sz="4400" dirty="0"/>
+              <a:t>Add more fraud patterns to improve detection coverage</a:t>
+            </a:r>
+          </a:p>
+          <a:p>
+            <a:pPr marL="571500" indent="-571500">
+              <a:buFont typeface="Arial"/>
+              <a:buChar char="•"/>
+            </a:pPr>
+            <a:endParaRPr lang="en-US" sz="4400" dirty="0"/>
+          </a:p>
+          <a:p>
+            <a:pPr marL="571500" indent="-571500">
+              <a:buFont typeface="Arial"/>
+              <a:buChar char="•"/>
+            </a:pPr>
+            <a:r>
+              <a:rPr lang="en-US" sz="4400" dirty="0"/>
+              <a:t>Enhance dashboard and data generation for better realism and usability</a:t>
             </a:r>
             <a:endParaRPr lang="en-US" sz="4200" dirty="0">
               <a:solidFill>

--- a/CreditCardFraudDetectionPosterDraft.pptx
+++ b/CreditCardFraudDetectionPosterDraft.pptx
@@ -1347,7 +1347,7 @@
           <a:p>
             <a:fld id="{CEBE6B28-3DE3-42BF-951E-F1C85EED5018}" type="datetimeFigureOut">
               <a:rPr lang="en-US" smtClean="0"/>
-              <a:t>4/22/2026</a:t>
+              <a:t>4/29/2026</a:t>
             </a:fld>
             <a:endParaRPr lang="en-US"/>
           </a:p>
@@ -6013,8 +6013,8 @@
         </p:nvSpPr>
         <p:spPr bwMode="auto">
           <a:xfrm>
-            <a:off x="13389000" y="15544798"/>
-            <a:ext cx="11585067" cy="14524893"/>
+            <a:off x="13389000" y="15777930"/>
+            <a:ext cx="11585067" cy="14291761"/>
           </a:xfrm>
           <a:prstGeom prst="rect">
             <a:avLst/>
@@ -6251,7 +6251,7 @@
         </p:nvSpPr>
         <p:spPr bwMode="auto">
           <a:xfrm>
-            <a:off x="13762503" y="15685788"/>
+            <a:off x="13762503" y="16116092"/>
             <a:ext cx="7042150" cy="923330"/>
           </a:xfrm>
           <a:prstGeom prst="rect">
@@ -6940,8 +6940,8 @@
         </p:nvSpPr>
         <p:spPr>
           <a:xfrm>
-            <a:off x="25755645" y="5291955"/>
-            <a:ext cx="10341625" cy="12834283"/>
+            <a:off x="25755645" y="4861651"/>
+            <a:ext cx="10341625" cy="14188500"/>
           </a:xfrm>
           <a:prstGeom prst="rect">
             <a:avLst/>
@@ -6967,7 +6967,35 @@
                   <a:schemeClr val="tx2"/>
                 </a:solidFill>
               </a:rPr>
-              <a:t>Obtain transaction data either by generating synthetic credit card transactions or uploading a user-provided CSV file.</a:t>
+              <a:t>Start by uploading a user-provided CSV transaction file.</a:t>
+            </a:r>
+          </a:p>
+          <a:p>
+            <a:pPr marL="571500" indent="-571500">
+              <a:buFont typeface="Arial"/>
+              <a:buChar char="•"/>
+            </a:pPr>
+            <a:endParaRPr lang="en-US" sz="4400" dirty="0">
+              <a:solidFill>
+                <a:schemeClr val="tx2"/>
+              </a:solidFill>
+            </a:endParaRPr>
+          </a:p>
+          <a:p>
+            <a:pPr marL="571500" indent="-571500">
+              <a:buFont typeface="Arial"/>
+              <a:buChar char="•"/>
+            </a:pPr>
+            <a:r>
+              <a:rPr lang="en-US" sz="4400" dirty="0">
+                <a:solidFill>
+                  <a:schemeClr val="tx2"/>
+                </a:solidFill>
+                <a:latin typeface="Times"/>
+                <a:ea typeface="MS PGothic"/>
+                <a:cs typeface="Times"/>
+              </a:rPr>
+              <a:t>Optionally, generate synthetic transaction data, and upload that instead</a:t>
             </a:r>
             <a:endParaRPr lang="en-US" sz="4200" dirty="0">
               <a:solidFill>
@@ -7019,7 +7047,7 @@
             </a:pPr>
             <a:r>
               <a:rPr lang="en-US" sz="4400" dirty="0"/>
-              <a:t>Process the data using a machine learning model to evaluate each transaction and determine the likelihood of fraud.</a:t>
+              <a:t>Process the data using a logistic regression machine learning model to evaluate each transaction and determine the likelihood of fraud.</a:t>
             </a:r>
           </a:p>
           <a:p>
@@ -7286,7 +7314,7 @@
             </a:r>
             <a:r>
               <a:rPr lang="en-US" sz="4400" dirty="0"/>
-              <a:t> To construct machine learning model and doing inference</a:t>
+              <a:t> To construct logistic regression machine learning model and doing inference</a:t>
             </a:r>
           </a:p>
           <a:p>
@@ -8774,7 +8802,7 @@
             </a:pPr>
             <a:r>
               <a:rPr lang="en-US" sz="4400" dirty="0"/>
-              <a:t>Enhance dashboard and data generation for better realism and usability</a:t>
+              <a:t>Enhance dashboard with more analytics for better realism and usability</a:t>
             </a:r>
             <a:endParaRPr lang="en-US" sz="4200" dirty="0">
               <a:solidFill>
@@ -9961,12 +9989,14 @@
 </file>
 
 <file path=customXml/item1.xml><?xml version="1.0" encoding="utf-8"?>
-<?mso-contentType ?>
-<FormTemplates xmlns="http://schemas.microsoft.com/sharepoint/v3/contenttype/forms">
-  <Display>DocumentLibraryForm</Display>
-  <Edit>DocumentLibraryForm</Edit>
-  <New>DocumentLibraryForm</New>
-</FormTemplates>
+<p:properties xmlns:p="http://schemas.microsoft.com/office/2006/metadata/properties" xmlns:xsi="http://www.w3.org/2001/XMLSchema-instance" xmlns:pc="http://schemas.microsoft.com/office/infopath/2007/PartnerControls">
+  <documentManagement>
+    <TaxCatchAll xmlns="5539b973-2d41-43c1-9bb3-8188283ed674" xsi:nil="true"/>
+    <lcf76f155ced4ddcb4097134ff3c332f xmlns="0629ad77-91cb-41d2-9af5-65b9610f30e7">
+      <Terms xmlns="http://schemas.microsoft.com/office/infopath/2007/PartnerControls"/>
+    </lcf76f155ced4ddcb4097134ff3c332f>
+  </documentManagement>
+</p:properties>
 </file>
 
 <file path=customXml/item2.xml><?xml version="1.0" encoding="utf-8"?>
@@ -10153,20 +10183,29 @@
 </file>
 
 <file path=customXml/item3.xml><?xml version="1.0" encoding="utf-8"?>
-<p:properties xmlns:p="http://schemas.microsoft.com/office/2006/metadata/properties" xmlns:xsi="http://www.w3.org/2001/XMLSchema-instance" xmlns:pc="http://schemas.microsoft.com/office/infopath/2007/PartnerControls">
-  <documentManagement>
-    <TaxCatchAll xmlns="5539b973-2d41-43c1-9bb3-8188283ed674" xsi:nil="true"/>
-    <lcf76f155ced4ddcb4097134ff3c332f xmlns="0629ad77-91cb-41d2-9af5-65b9610f30e7">
-      <Terms xmlns="http://schemas.microsoft.com/office/infopath/2007/PartnerControls"/>
-    </lcf76f155ced4ddcb4097134ff3c332f>
-  </documentManagement>
-</p:properties>
+<?mso-contentType ?>
+<FormTemplates xmlns="http://schemas.microsoft.com/sharepoint/v3/contenttype/forms">
+  <Display>DocumentLibraryForm</Display>
+  <Edit>DocumentLibraryForm</Edit>
+  <New>DocumentLibraryForm</New>
+</FormTemplates>
 </file>
 
 <file path=customXml/itemProps1.xml><?xml version="1.0" encoding="utf-8"?>
-<ds:datastoreItem xmlns:ds="http://schemas.openxmlformats.org/officeDocument/2006/customXml" ds:itemID="{10FF5450-53B2-4B4D-A425-BFED8866581A}">
+<ds:datastoreItem xmlns:ds="http://schemas.openxmlformats.org/officeDocument/2006/customXml" ds:itemID="{86A46863-FF25-4FA1-B2DE-24E5A948D8E8}">
   <ds:schemaRefs>
-    <ds:schemaRef ds:uri="http://schemas.microsoft.com/sharepoint/v3/contenttype/forms"/>
+    <ds:schemaRef ds:uri="0629ad77-91cb-41d2-9af5-65b9610f30e7"/>
+    <ds:schemaRef ds:uri="5539b973-2d41-43c1-9bb3-8188283ed674"/>
+    <ds:schemaRef ds:uri="b66ed98e-d26e-4cbc-a2b0-bddfeb6f0a79"/>
+    <ds:schemaRef ds:uri="bed300c7-e8ea-4794-8f8f-e9031014235a"/>
+    <ds:schemaRef ds:uri="http://purl.org/dc/dcmitype/"/>
+    <ds:schemaRef ds:uri="http://purl.org/dc/elements/1.1/"/>
+    <ds:schemaRef ds:uri="http://purl.org/dc/terms/"/>
+    <ds:schemaRef ds:uri="http://schemas.microsoft.com/office/2006/documentManagement/types"/>
+    <ds:schemaRef ds:uri="http://schemas.microsoft.com/office/2006/metadata/properties"/>
+    <ds:schemaRef ds:uri="http://schemas.microsoft.com/office/infopath/2007/PartnerControls"/>
+    <ds:schemaRef ds:uri="http://schemas.openxmlformats.org/package/2006/metadata/core-properties"/>
+    <ds:schemaRef ds:uri="http://www.w3.org/XML/1998/namespace"/>
   </ds:schemaRefs>
 </ds:datastoreItem>
 </file>
@@ -10191,20 +10230,9 @@
 </file>
 
 <file path=customXml/itemProps3.xml><?xml version="1.0" encoding="utf-8"?>
-<ds:datastoreItem xmlns:ds="http://schemas.openxmlformats.org/officeDocument/2006/customXml" ds:itemID="{86A46863-FF25-4FA1-B2DE-24E5A948D8E8}">
+<ds:datastoreItem xmlns:ds="http://schemas.openxmlformats.org/officeDocument/2006/customXml" ds:itemID="{10FF5450-53B2-4B4D-A425-BFED8866581A}">
   <ds:schemaRefs>
-    <ds:schemaRef ds:uri="0629ad77-91cb-41d2-9af5-65b9610f30e7"/>
-    <ds:schemaRef ds:uri="5539b973-2d41-43c1-9bb3-8188283ed674"/>
-    <ds:schemaRef ds:uri="b66ed98e-d26e-4cbc-a2b0-bddfeb6f0a79"/>
-    <ds:schemaRef ds:uri="bed300c7-e8ea-4794-8f8f-e9031014235a"/>
-    <ds:schemaRef ds:uri="http://purl.org/dc/dcmitype/"/>
-    <ds:schemaRef ds:uri="http://purl.org/dc/elements/1.1/"/>
-    <ds:schemaRef ds:uri="http://purl.org/dc/terms/"/>
-    <ds:schemaRef ds:uri="http://schemas.microsoft.com/office/2006/documentManagement/types"/>
-    <ds:schemaRef ds:uri="http://schemas.microsoft.com/office/2006/metadata/properties"/>
-    <ds:schemaRef ds:uri="http://schemas.microsoft.com/office/infopath/2007/PartnerControls"/>
-    <ds:schemaRef ds:uri="http://schemas.openxmlformats.org/package/2006/metadata/core-properties"/>
-    <ds:schemaRef ds:uri="http://www.w3.org/XML/1998/namespace"/>
+    <ds:schemaRef ds:uri="http://schemas.microsoft.com/sharepoint/v3/contenttype/forms"/>
   </ds:schemaRefs>
 </ds:datastoreItem>
 </file>